--- a/styleguide/styleguide.pptx
+++ b/styleguide/styleguide.pptx
@@ -5,13 +5,14 @@
     <p:sldMasterId id="2147483648" r:id="rId1"/>
   </p:sldMasterIdLst>
   <p:notesMasterIdLst>
-    <p:notesMasterId r:id="rId8"/>
+    <p:notesMasterId r:id="rId9"/>
   </p:notesMasterIdLst>
   <p:sldIdLst>
     <p:sldId id="256" r:id="rId4"/>
     <p:sldId id="257" r:id="rId5"/>
     <p:sldId id="258" r:id="rId6"/>
     <p:sldId id="259" r:id="rId7"/>
+    <p:sldId id="260" r:id="rId8"/>
   </p:sldIdLst>
   <p:sldSz cx="12192000" cy="6858000"/>
   <p:notesSz cx="6858000" cy="9144000"/>
@@ -137,7 +138,7 @@
       </p:grpSpPr>
       <p:sp>
         <p:nvSpPr>
-          <p:cNvPr id="917675799" name="Header Placeholder 1"/>
+          <p:cNvPr id="1634033670" name="Header Placeholder 1"/>
           <p:cNvSpPr>
             <a:spLocks noGrp="1"/>
           </p:cNvSpPr>
@@ -171,7 +172,7 @@
       </p:sp>
       <p:sp>
         <p:nvSpPr>
-          <p:cNvPr id="1290484947" name="Date Placeholder 2"/>
+          <p:cNvPr id="596915697" name="Date Placeholder 2"/>
           <p:cNvSpPr>
             <a:spLocks noGrp="1"/>
           </p:cNvSpPr>
@@ -209,7 +210,7 @@
       </p:sp>
       <p:sp>
         <p:nvSpPr>
-          <p:cNvPr id="2011475183" name="Slide Image Placeholder 3"/>
+          <p:cNvPr id="861675769" name="Slide Image Placeholder 3"/>
           <p:cNvSpPr>
             <a:spLocks noChangeAspect="1" noGrp="1" noRot="1"/>
           </p:cNvSpPr>
@@ -245,7 +246,7 @@
       </p:sp>
       <p:sp>
         <p:nvSpPr>
-          <p:cNvPr id="1026897138" name="Notes Placeholder 4"/>
+          <p:cNvPr id="1336370877" name="Notes Placeholder 4"/>
           <p:cNvSpPr>
             <a:spLocks noGrp="1"/>
           </p:cNvSpPr>
@@ -319,7 +320,7 @@
       </p:sp>
       <p:sp>
         <p:nvSpPr>
-          <p:cNvPr id="455592062" name="Footer Placeholder 5"/>
+          <p:cNvPr id="1681843027" name="Footer Placeholder 5"/>
           <p:cNvSpPr>
             <a:spLocks noGrp="1"/>
           </p:cNvSpPr>
@@ -353,7 +354,7 @@
       </p:sp>
       <p:sp>
         <p:nvSpPr>
-          <p:cNvPr id="780139588" name="Slide Number Placeholder 6"/>
+          <p:cNvPr id="1153016236" name="Slide Number Placeholder 6"/>
           <p:cNvSpPr>
             <a:spLocks noGrp="1"/>
           </p:cNvSpPr>
@@ -506,7 +507,7 @@
       </p:grpSpPr>
       <p:sp>
         <p:nvSpPr>
-          <p:cNvPr id="1853588257" name="Slide Image Placeholder 1"/>
+          <p:cNvPr id="2100788580" name="Slide Image Placeholder 1"/>
           <p:cNvSpPr>
             <a:spLocks noChangeAspect="1" noGrp="1" noRot="1"/>
           </p:cNvSpPr>
@@ -523,7 +524,7 @@
       </p:sp>
       <p:sp>
         <p:nvSpPr>
-          <p:cNvPr id="809024845" name="Notes Placeholder 2"/>
+          <p:cNvPr id="976343248" name="Notes Placeholder 2"/>
           <p:cNvSpPr>
             <a:spLocks noGrp="1"/>
           </p:cNvSpPr>
@@ -548,7 +549,7 @@
       </p:sp>
       <p:sp>
         <p:nvSpPr>
-          <p:cNvPr id="1213196726" name="Slide Number Placeholder 3"/>
+          <p:cNvPr id="327734253" name="Slide Number Placeholder 3"/>
           <p:cNvSpPr>
             <a:spLocks noGrp="1"/>
           </p:cNvSpPr>
@@ -599,7 +600,7 @@
       </p:grpSpPr>
       <p:sp>
         <p:nvSpPr>
-          <p:cNvPr id="2" name="Slide Image Placeholder 1"/>
+          <p:cNvPr id="1932452420" name="Slide Image Placeholder 1"/>
           <p:cNvSpPr>
             <a:spLocks noChangeAspect="1" noGrp="1" noRot="1"/>
           </p:cNvSpPr>
@@ -611,7 +612,7 @@
       </p:sp>
       <p:sp>
         <p:nvSpPr>
-          <p:cNvPr id="3" name="Notes Placeholder 2"/>
+          <p:cNvPr id="416329105" name="Notes Placeholder 2"/>
           <p:cNvSpPr>
             <a:spLocks noGrp="1"/>
           </p:cNvSpPr>
@@ -633,7 +634,7 @@
       </p:sp>
       <p:sp>
         <p:nvSpPr>
-          <p:cNvPr id="4" name="Slide Number Placeholder 3"/>
+          <p:cNvPr id="1575316431" name="Slide Number Placeholder 3"/>
           <p:cNvSpPr>
             <a:spLocks noGrp="1"/>
           </p:cNvSpPr>
@@ -684,7 +685,7 @@
       </p:grpSpPr>
       <p:sp>
         <p:nvSpPr>
-          <p:cNvPr id="2" name="Slide Image Placeholder 1"/>
+          <p:cNvPr id="461138292" name="Slide Image Placeholder 1"/>
           <p:cNvSpPr>
             <a:spLocks noChangeAspect="1" noGrp="1" noRot="1"/>
           </p:cNvSpPr>
@@ -696,7 +697,7 @@
       </p:sp>
       <p:sp>
         <p:nvSpPr>
-          <p:cNvPr id="3" name="Notes Placeholder 2"/>
+          <p:cNvPr id="202447597" name="Notes Placeholder 2"/>
           <p:cNvSpPr>
             <a:spLocks noGrp="1"/>
           </p:cNvSpPr>
@@ -729,7 +730,7 @@
       </p:sp>
       <p:sp>
         <p:nvSpPr>
-          <p:cNvPr id="4" name="Slide Number Placeholder 3"/>
+          <p:cNvPr id="1880204867" name="Slide Number Placeholder 3"/>
           <p:cNvSpPr>
             <a:spLocks noGrp="1"/>
           </p:cNvSpPr>
@@ -780,7 +781,7 @@
       </p:grpSpPr>
       <p:sp>
         <p:nvSpPr>
-          <p:cNvPr id="2" name="Slide Image Placeholder 1"/>
+          <p:cNvPr id="1436802858" name="Slide Image Placeholder 1"/>
           <p:cNvSpPr>
             <a:spLocks noChangeAspect="1" noGrp="1" noRot="1"/>
           </p:cNvSpPr>
@@ -792,7 +793,7 @@
       </p:sp>
       <p:sp>
         <p:nvSpPr>
-          <p:cNvPr id="3" name="Notes Placeholder 2"/>
+          <p:cNvPr id="1772436601" name="Notes Placeholder 2"/>
           <p:cNvSpPr>
             <a:spLocks noGrp="1"/>
           </p:cNvSpPr>
@@ -825,6 +826,91 @@
       </p:sp>
       <p:sp>
         <p:nvSpPr>
+          <p:cNvPr id="656202714" name="Slide Number Placeholder 3"/>
+          <p:cNvSpPr>
+            <a:spLocks noGrp="1"/>
+          </p:cNvSpPr>
+          <p:nvPr>
+            <p:ph type="sldNum" sz="quarter" idx="10"/>
+          </p:nvPr>
+        </p:nvSpPr>
+        <p:spPr bwMode="auto"/>
+        <p:txBody>
+          <a:bodyPr/>
+          <a:lstStyle/>
+          <a:p>
+            <a:pPr>
+              <a:defRPr/>
+            </a:pPr>
+            <a:fld id="{6722499D-CA23-7057-BC1D-7B579C7143C1}" type="slidenum">
+              <a:rPr/>
+              <a:t/>
+            </a:fld>
+            <a:endParaRPr/>
+          </a:p>
+        </p:txBody>
+      </p:sp>
+    </p:spTree>
+  </p:cSld>
+  <p:clrMapOvr>
+    <a:masterClrMapping/>
+  </p:clrMapOvr>
+</p:notes>
+</file>
+
+<file path=ppt/notesSlides/notesSlide5.xml><?xml version="1.0" encoding="utf-8"?>
+<p:notes xmlns:a="http://schemas.openxmlformats.org/drawingml/2006/main" xmlns:r="http://schemas.openxmlformats.org/officeDocument/2006/relationships" xmlns:p="http://schemas.openxmlformats.org/presentationml/2006/main" xmlns:m="http://schemas.openxmlformats.org/officeDocument/2006/math" xmlns:w="http://schemas.openxmlformats.org/wordprocessingml/2006/main">
+  <p:cSld name="">
+    <p:spTree>
+      <p:nvGrpSpPr>
+        <p:cNvPr id="1" name=""/>
+        <p:cNvGrpSpPr/>
+        <p:nvPr/>
+      </p:nvGrpSpPr>
+      <p:grpSpPr bwMode="auto">
+        <a:xfrm>
+          <a:off x="0" y="0"/>
+          <a:ext cx="0" cy="0"/>
+          <a:chOff x="0" y="0"/>
+          <a:chExt cx="0" cy="0"/>
+        </a:xfrm>
+      </p:grpSpPr>
+      <p:sp>
+        <p:nvSpPr>
+          <p:cNvPr id="2" name="Slide Image Placeholder 1"/>
+          <p:cNvSpPr>
+            <a:spLocks noChangeAspect="1" noGrp="1" noRot="1"/>
+          </p:cNvSpPr>
+          <p:nvPr>
+            <p:ph type="sldImg"/>
+          </p:nvPr>
+        </p:nvSpPr>
+        <p:spPr bwMode="auto"/>
+      </p:sp>
+      <p:sp>
+        <p:nvSpPr>
+          <p:cNvPr id="3" name="Notes Placeholder 2"/>
+          <p:cNvSpPr>
+            <a:spLocks noGrp="1"/>
+          </p:cNvSpPr>
+          <p:nvPr>
+            <p:ph type="body" idx="1"/>
+          </p:nvPr>
+        </p:nvSpPr>
+        <p:spPr bwMode="auto"/>
+        <p:txBody>
+          <a:bodyPr/>
+          <a:lstStyle/>
+          <a:p>
+            <a:pPr>
+              <a:defRPr/>
+            </a:pPr>
+            <a:endParaRPr/>
+          </a:p>
+        </p:txBody>
+      </p:sp>
+      <p:sp>
+        <p:nvSpPr>
           <p:cNvPr id="4" name="Slide Number Placeholder 3"/>
           <p:cNvSpPr>
             <a:spLocks noGrp="1"/>
@@ -841,7 +927,7 @@
             <a:pPr>
               <a:defRPr/>
             </a:pPr>
-            <a:fld id="{6722499D-CA23-7057-BC1D-7B579C7143C1}" type="slidenum">
+            <a:fld id="{595AF19B-2BC3-A2D8-463D-E5A9624BA3C4}" type="slidenum">
               <a:rPr/>
               <a:t/>
             </a:fld>
@@ -876,7 +962,7 @@
       </p:grpSpPr>
       <p:sp>
         <p:nvSpPr>
-          <p:cNvPr id="270590021" name="Title 1"/>
+          <p:cNvPr id="939862480" name="Title 1"/>
           <p:cNvSpPr>
             <a:spLocks noGrp="1"/>
           </p:cNvSpPr>
@@ -911,7 +997,7 @@
       </p:sp>
       <p:sp>
         <p:nvSpPr>
-          <p:cNvPr id="1951387693" name="Subtitle 2"/>
+          <p:cNvPr id="199306180" name="Subtitle 2"/>
           <p:cNvSpPr>
             <a:spLocks noGrp="1"/>
           </p:cNvSpPr>
@@ -979,7 +1065,7 @@
       </p:sp>
       <p:sp>
         <p:nvSpPr>
-          <p:cNvPr id="579830573" name="Date Placeholder 3"/>
+          <p:cNvPr id="1032481708" name="Date Placeholder 3"/>
           <p:cNvSpPr>
             <a:spLocks noGrp="1"/>
           </p:cNvSpPr>
@@ -1005,7 +1091,7 @@
       </p:sp>
       <p:sp>
         <p:nvSpPr>
-          <p:cNvPr id="1531959034" name="Footer Placeholder 4"/>
+          <p:cNvPr id="541742176" name="Footer Placeholder 4"/>
           <p:cNvSpPr>
             <a:spLocks noGrp="1"/>
           </p:cNvSpPr>
@@ -1027,7 +1113,7 @@
       </p:sp>
       <p:sp>
         <p:nvSpPr>
-          <p:cNvPr id="714200605" name="Slide Number Placeholder 5"/>
+          <p:cNvPr id="1441538488" name="Slide Number Placeholder 5"/>
           <p:cNvSpPr>
             <a:spLocks noGrp="1"/>
           </p:cNvSpPr>
@@ -1078,7 +1164,7 @@
       </p:grpSpPr>
       <p:sp>
         <p:nvSpPr>
-          <p:cNvPr id="336973784" name="Title 1"/>
+          <p:cNvPr id="83025473" name="Title 1"/>
           <p:cNvSpPr>
             <a:spLocks noGrp="1"/>
           </p:cNvSpPr>
@@ -1104,7 +1190,7 @@
       </p:sp>
       <p:sp>
         <p:nvSpPr>
-          <p:cNvPr id="1966882488" name="Vertical Text Placeholder 2"/>
+          <p:cNvPr id="1318159837" name="Vertical Text Placeholder 2"/>
           <p:cNvSpPr>
             <a:spLocks noGrp="1"/>
           </p:cNvSpPr>
@@ -1170,7 +1256,7 @@
       </p:sp>
       <p:sp>
         <p:nvSpPr>
-          <p:cNvPr id="250183147" name="Date Placeholder 3"/>
+          <p:cNvPr id="1886997966" name="Date Placeholder 3"/>
           <p:cNvSpPr>
             <a:spLocks noGrp="1"/>
           </p:cNvSpPr>
@@ -1196,7 +1282,7 @@
       </p:sp>
       <p:sp>
         <p:nvSpPr>
-          <p:cNvPr id="157635074" name="Footer Placeholder 4"/>
+          <p:cNvPr id="736295331" name="Footer Placeholder 4"/>
           <p:cNvSpPr>
             <a:spLocks noGrp="1"/>
           </p:cNvSpPr>
@@ -1218,7 +1304,7 @@
       </p:sp>
       <p:sp>
         <p:nvSpPr>
-          <p:cNvPr id="1207567854" name="Slide Number Placeholder 5"/>
+          <p:cNvPr id="1313952885" name="Slide Number Placeholder 5"/>
           <p:cNvSpPr>
             <a:spLocks noGrp="1"/>
           </p:cNvSpPr>
@@ -1269,7 +1355,7 @@
       </p:grpSpPr>
       <p:sp>
         <p:nvSpPr>
-          <p:cNvPr id="2061059809" name="Vertical Title 1"/>
+          <p:cNvPr id="352047124" name="Vertical Title 1"/>
           <p:cNvSpPr>
             <a:spLocks noGrp="1"/>
           </p:cNvSpPr>
@@ -1300,7 +1386,7 @@
       </p:sp>
       <p:sp>
         <p:nvSpPr>
-          <p:cNvPr id="1194564559" name="Vertical Text Placeholder 2"/>
+          <p:cNvPr id="1268324881" name="Vertical Text Placeholder 2"/>
           <p:cNvSpPr>
             <a:spLocks noGrp="1"/>
           </p:cNvSpPr>
@@ -1371,7 +1457,7 @@
       </p:sp>
       <p:sp>
         <p:nvSpPr>
-          <p:cNvPr id="1927906916" name="Date Placeholder 3"/>
+          <p:cNvPr id="1364368258" name="Date Placeholder 3"/>
           <p:cNvSpPr>
             <a:spLocks noGrp="1"/>
           </p:cNvSpPr>
@@ -1397,7 +1483,7 @@
       </p:sp>
       <p:sp>
         <p:nvSpPr>
-          <p:cNvPr id="2022965701" name="Footer Placeholder 4"/>
+          <p:cNvPr id="1785361369" name="Footer Placeholder 4"/>
           <p:cNvSpPr>
             <a:spLocks noGrp="1"/>
           </p:cNvSpPr>
@@ -1419,7 +1505,7 @@
       </p:sp>
       <p:sp>
         <p:nvSpPr>
-          <p:cNvPr id="2069372030" name="Slide Number Placeholder 5"/>
+          <p:cNvPr id="1758051277" name="Slide Number Placeholder 5"/>
           <p:cNvSpPr>
             <a:spLocks noGrp="1"/>
           </p:cNvSpPr>
@@ -1470,7 +1556,7 @@
       </p:grpSpPr>
       <p:sp>
         <p:nvSpPr>
-          <p:cNvPr id="358466247" name="Title 1"/>
+          <p:cNvPr id="1008341246" name="Title 1"/>
           <p:cNvSpPr>
             <a:spLocks noGrp="1"/>
           </p:cNvSpPr>
@@ -1496,7 +1582,7 @@
       </p:sp>
       <p:sp>
         <p:nvSpPr>
-          <p:cNvPr id="978771693" name="Content Placeholder 2"/>
+          <p:cNvPr id="107854710" name="Content Placeholder 2"/>
           <p:cNvSpPr>
             <a:spLocks noGrp="1"/>
           </p:cNvSpPr>
@@ -1562,7 +1648,7 @@
       </p:sp>
       <p:sp>
         <p:nvSpPr>
-          <p:cNvPr id="608592872" name="Date Placeholder 3"/>
+          <p:cNvPr id="1050292357" name="Date Placeholder 3"/>
           <p:cNvSpPr>
             <a:spLocks noGrp="1"/>
           </p:cNvSpPr>
@@ -1588,7 +1674,7 @@
       </p:sp>
       <p:sp>
         <p:nvSpPr>
-          <p:cNvPr id="1294029134" name="Footer Placeholder 4"/>
+          <p:cNvPr id="656134893" name="Footer Placeholder 4"/>
           <p:cNvSpPr>
             <a:spLocks noGrp="1"/>
           </p:cNvSpPr>
@@ -1610,7 +1696,7 @@
       </p:sp>
       <p:sp>
         <p:nvSpPr>
-          <p:cNvPr id="779812557" name="Slide Number Placeholder 5"/>
+          <p:cNvPr id="674485190" name="Slide Number Placeholder 5"/>
           <p:cNvSpPr>
             <a:spLocks noGrp="1"/>
           </p:cNvSpPr>
@@ -1661,7 +1747,7 @@
       </p:grpSpPr>
       <p:sp>
         <p:nvSpPr>
-          <p:cNvPr id="1723649256" name="Title 1"/>
+          <p:cNvPr id="1901560396" name="Title 1"/>
           <p:cNvSpPr>
             <a:spLocks noGrp="1"/>
           </p:cNvSpPr>
@@ -1696,7 +1782,7 @@
       </p:sp>
       <p:sp>
         <p:nvSpPr>
-          <p:cNvPr id="1034557221" name="Text Placeholder 2"/>
+          <p:cNvPr id="386233762" name="Text Placeholder 2"/>
           <p:cNvSpPr>
             <a:spLocks noGrp="1"/>
           </p:cNvSpPr>
@@ -1818,7 +1904,7 @@
       </p:sp>
       <p:sp>
         <p:nvSpPr>
-          <p:cNvPr id="910711273" name="Date Placeholder 3"/>
+          <p:cNvPr id="1771157326" name="Date Placeholder 3"/>
           <p:cNvSpPr>
             <a:spLocks noGrp="1"/>
           </p:cNvSpPr>
@@ -1844,7 +1930,7 @@
       </p:sp>
       <p:sp>
         <p:nvSpPr>
-          <p:cNvPr id="652318970" name="Footer Placeholder 4"/>
+          <p:cNvPr id="1047373237" name="Footer Placeholder 4"/>
           <p:cNvSpPr>
             <a:spLocks noGrp="1"/>
           </p:cNvSpPr>
@@ -1866,7 +1952,7 @@
       </p:sp>
       <p:sp>
         <p:nvSpPr>
-          <p:cNvPr id="1161199928" name="Slide Number Placeholder 5"/>
+          <p:cNvPr id="908798612" name="Slide Number Placeholder 5"/>
           <p:cNvSpPr>
             <a:spLocks noGrp="1"/>
           </p:cNvSpPr>
@@ -1917,7 +2003,7 @@
       </p:grpSpPr>
       <p:sp>
         <p:nvSpPr>
-          <p:cNvPr id="1543839040" name="Title 1"/>
+          <p:cNvPr id="520803093" name="Title 1"/>
           <p:cNvSpPr>
             <a:spLocks noGrp="1"/>
           </p:cNvSpPr>
@@ -1943,7 +2029,7 @@
       </p:sp>
       <p:sp>
         <p:nvSpPr>
-          <p:cNvPr id="894047058" name="Content Placeholder 2"/>
+          <p:cNvPr id="1176562702" name="Content Placeholder 2"/>
           <p:cNvSpPr>
             <a:spLocks noGrp="1"/>
           </p:cNvSpPr>
@@ -2014,7 +2100,7 @@
       </p:sp>
       <p:sp>
         <p:nvSpPr>
-          <p:cNvPr id="138457226" name="Content Placeholder 3"/>
+          <p:cNvPr id="1535140641" name="Content Placeholder 3"/>
           <p:cNvSpPr>
             <a:spLocks noGrp="1"/>
           </p:cNvSpPr>
@@ -2085,7 +2171,7 @@
       </p:sp>
       <p:sp>
         <p:nvSpPr>
-          <p:cNvPr id="270464590" name="Date Placeholder 4"/>
+          <p:cNvPr id="324964639" name="Date Placeholder 4"/>
           <p:cNvSpPr>
             <a:spLocks noGrp="1"/>
           </p:cNvSpPr>
@@ -2111,7 +2197,7 @@
       </p:sp>
       <p:sp>
         <p:nvSpPr>
-          <p:cNvPr id="1524431405" name="Footer Placeholder 5"/>
+          <p:cNvPr id="1300178815" name="Footer Placeholder 5"/>
           <p:cNvSpPr>
             <a:spLocks noGrp="1"/>
           </p:cNvSpPr>
@@ -2133,7 +2219,7 @@
       </p:sp>
       <p:sp>
         <p:nvSpPr>
-          <p:cNvPr id="1823020824" name="Slide Number Placeholder 6"/>
+          <p:cNvPr id="1311914785" name="Slide Number Placeholder 6"/>
           <p:cNvSpPr>
             <a:spLocks noGrp="1"/>
           </p:cNvSpPr>
@@ -2184,7 +2270,7 @@
       </p:grpSpPr>
       <p:sp>
         <p:nvSpPr>
-          <p:cNvPr id="490021169" name="Title 1"/>
+          <p:cNvPr id="1346222690" name="Title 1"/>
           <p:cNvSpPr>
             <a:spLocks noGrp="1"/>
           </p:cNvSpPr>
@@ -2215,7 +2301,7 @@
       </p:sp>
       <p:sp>
         <p:nvSpPr>
-          <p:cNvPr id="1446537841" name="Text Placeholder 2"/>
+          <p:cNvPr id="290075548" name="Text Placeholder 2"/>
           <p:cNvSpPr>
             <a:spLocks noGrp="1"/>
           </p:cNvSpPr>
@@ -2283,7 +2369,7 @@
       </p:sp>
       <p:sp>
         <p:nvSpPr>
-          <p:cNvPr id="1505183488" name="Content Placeholder 3"/>
+          <p:cNvPr id="1141049938" name="Content Placeholder 3"/>
           <p:cNvSpPr>
             <a:spLocks noGrp="1"/>
           </p:cNvSpPr>
@@ -2354,7 +2440,7 @@
       </p:sp>
       <p:sp>
         <p:nvSpPr>
-          <p:cNvPr id="1271979411" name="Text Placeholder 4"/>
+          <p:cNvPr id="254451915" name="Text Placeholder 4"/>
           <p:cNvSpPr>
             <a:spLocks noGrp="1"/>
           </p:cNvSpPr>
@@ -2422,7 +2508,7 @@
       </p:sp>
       <p:sp>
         <p:nvSpPr>
-          <p:cNvPr id="2109130966" name="Content Placeholder 5"/>
+          <p:cNvPr id="226192847" name="Content Placeholder 5"/>
           <p:cNvSpPr>
             <a:spLocks noGrp="1"/>
           </p:cNvSpPr>
@@ -2493,7 +2579,7 @@
       </p:sp>
       <p:sp>
         <p:nvSpPr>
-          <p:cNvPr id="1614385405" name="Date Placeholder 6"/>
+          <p:cNvPr id="1732568839" name="Date Placeholder 6"/>
           <p:cNvSpPr>
             <a:spLocks noGrp="1"/>
           </p:cNvSpPr>
@@ -2519,7 +2605,7 @@
       </p:sp>
       <p:sp>
         <p:nvSpPr>
-          <p:cNvPr id="1687865818" name="Footer Placeholder 7"/>
+          <p:cNvPr id="993663185" name="Footer Placeholder 7"/>
           <p:cNvSpPr>
             <a:spLocks noGrp="1"/>
           </p:cNvSpPr>
@@ -2541,7 +2627,7 @@
       </p:sp>
       <p:sp>
         <p:nvSpPr>
-          <p:cNvPr id="922229101" name="Slide Number Placeholder 8"/>
+          <p:cNvPr id="1385350543" name="Slide Number Placeholder 8"/>
           <p:cNvSpPr>
             <a:spLocks noGrp="1"/>
           </p:cNvSpPr>
@@ -2592,7 +2678,7 @@
       </p:grpSpPr>
       <p:sp>
         <p:nvSpPr>
-          <p:cNvPr id="1788365715" name="Title 1"/>
+          <p:cNvPr id="946214248" name="Title 1"/>
           <p:cNvSpPr>
             <a:spLocks noGrp="1"/>
           </p:cNvSpPr>
@@ -2618,7 +2704,7 @@
       </p:sp>
       <p:sp>
         <p:nvSpPr>
-          <p:cNvPr id="900545998" name="Date Placeholder 2"/>
+          <p:cNvPr id="1391317961" name="Date Placeholder 2"/>
           <p:cNvSpPr>
             <a:spLocks noGrp="1"/>
           </p:cNvSpPr>
@@ -2644,7 +2730,7 @@
       </p:sp>
       <p:sp>
         <p:nvSpPr>
-          <p:cNvPr id="1364399067" name="Footer Placeholder 3"/>
+          <p:cNvPr id="1961788089" name="Footer Placeholder 3"/>
           <p:cNvSpPr>
             <a:spLocks noGrp="1"/>
           </p:cNvSpPr>
@@ -2666,7 +2752,7 @@
       </p:sp>
       <p:sp>
         <p:nvSpPr>
-          <p:cNvPr id="1872193156" name="Slide Number Placeholder 4"/>
+          <p:cNvPr id="494720649" name="Slide Number Placeholder 4"/>
           <p:cNvSpPr>
             <a:spLocks noGrp="1"/>
           </p:cNvSpPr>
@@ -2717,7 +2803,7 @@
       </p:grpSpPr>
       <p:sp>
         <p:nvSpPr>
-          <p:cNvPr id="699347851" name="Date Placeholder 1"/>
+          <p:cNvPr id="296188682" name="Date Placeholder 1"/>
           <p:cNvSpPr>
             <a:spLocks noGrp="1"/>
           </p:cNvSpPr>
@@ -2743,7 +2829,7 @@
       </p:sp>
       <p:sp>
         <p:nvSpPr>
-          <p:cNvPr id="1912015226" name="Footer Placeholder 2"/>
+          <p:cNvPr id="1979481096" name="Footer Placeholder 2"/>
           <p:cNvSpPr>
             <a:spLocks noGrp="1"/>
           </p:cNvSpPr>
@@ -2765,7 +2851,7 @@
       </p:sp>
       <p:sp>
         <p:nvSpPr>
-          <p:cNvPr id="860811236" name="Slide Number Placeholder 3"/>
+          <p:cNvPr id="1565624515" name="Slide Number Placeholder 3"/>
           <p:cNvSpPr>
             <a:spLocks noGrp="1"/>
           </p:cNvSpPr>
@@ -2816,7 +2902,7 @@
       </p:grpSpPr>
       <p:sp>
         <p:nvSpPr>
-          <p:cNvPr id="1247902013" name="Title 1"/>
+          <p:cNvPr id="313589574" name="Title 1"/>
           <p:cNvSpPr>
             <a:spLocks noGrp="1"/>
           </p:cNvSpPr>
@@ -2851,7 +2937,7 @@
       </p:sp>
       <p:sp>
         <p:nvSpPr>
-          <p:cNvPr id="34493634" name="Content Placeholder 2"/>
+          <p:cNvPr id="1878700941" name="Content Placeholder 2"/>
           <p:cNvSpPr>
             <a:spLocks noGrp="1"/>
           </p:cNvSpPr>
@@ -2950,7 +3036,7 @@
       </p:sp>
       <p:sp>
         <p:nvSpPr>
-          <p:cNvPr id="1214207116" name="Text Placeholder 3"/>
+          <p:cNvPr id="1947503271" name="Text Placeholder 3"/>
           <p:cNvSpPr>
             <a:spLocks noGrp="1"/>
           </p:cNvSpPr>
@@ -3018,7 +3104,7 @@
       </p:sp>
       <p:sp>
         <p:nvSpPr>
-          <p:cNvPr id="2071587451" name="Date Placeholder 4"/>
+          <p:cNvPr id="1293808350" name="Date Placeholder 4"/>
           <p:cNvSpPr>
             <a:spLocks noGrp="1"/>
           </p:cNvSpPr>
@@ -3044,7 +3130,7 @@
       </p:sp>
       <p:sp>
         <p:nvSpPr>
-          <p:cNvPr id="1630446963" name="Footer Placeholder 5"/>
+          <p:cNvPr id="1613252719" name="Footer Placeholder 5"/>
           <p:cNvSpPr>
             <a:spLocks noGrp="1"/>
           </p:cNvSpPr>
@@ -3066,7 +3152,7 @@
       </p:sp>
       <p:sp>
         <p:nvSpPr>
-          <p:cNvPr id="1795143019" name="Slide Number Placeholder 6"/>
+          <p:cNvPr id="33963501" name="Slide Number Placeholder 6"/>
           <p:cNvSpPr>
             <a:spLocks noGrp="1"/>
           </p:cNvSpPr>
@@ -3117,7 +3203,7 @@
       </p:grpSpPr>
       <p:sp>
         <p:nvSpPr>
-          <p:cNvPr id="554894631" name="Title 1"/>
+          <p:cNvPr id="1725344328" name="Title 1"/>
           <p:cNvSpPr>
             <a:spLocks noGrp="1"/>
           </p:cNvSpPr>
@@ -3152,7 +3238,7 @@
       </p:sp>
       <p:sp>
         <p:nvSpPr>
-          <p:cNvPr id="52634222" name="Picture Placeholder 2"/>
+          <p:cNvPr id="1844034512" name="Picture Placeholder 2"/>
           <p:cNvSpPr>
             <a:spLocks noChangeAspect="1" noGrp="1"/>
           </p:cNvSpPr>
@@ -3220,7 +3306,7 @@
       </p:sp>
       <p:sp>
         <p:nvSpPr>
-          <p:cNvPr id="1173711401" name="Text Placeholder 3"/>
+          <p:cNvPr id="2027180903" name="Text Placeholder 3"/>
           <p:cNvSpPr>
             <a:spLocks noGrp="1"/>
           </p:cNvSpPr>
@@ -3288,7 +3374,7 @@
       </p:sp>
       <p:sp>
         <p:nvSpPr>
-          <p:cNvPr id="1623664035" name="Date Placeholder 4"/>
+          <p:cNvPr id="106068090" name="Date Placeholder 4"/>
           <p:cNvSpPr>
             <a:spLocks noGrp="1"/>
           </p:cNvSpPr>
@@ -3314,7 +3400,7 @@
       </p:sp>
       <p:sp>
         <p:nvSpPr>
-          <p:cNvPr id="1180744906" name="Footer Placeholder 5"/>
+          <p:cNvPr id="1504007244" name="Footer Placeholder 5"/>
           <p:cNvSpPr>
             <a:spLocks noGrp="1"/>
           </p:cNvSpPr>
@@ -3336,7 +3422,7 @@
       </p:sp>
       <p:sp>
         <p:nvSpPr>
-          <p:cNvPr id="1676941569" name="Slide Number Placeholder 6"/>
+          <p:cNvPr id="1557965499" name="Slide Number Placeholder 6"/>
           <p:cNvSpPr>
             <a:spLocks noGrp="1"/>
           </p:cNvSpPr>
@@ -3392,7 +3478,7 @@
       </p:grpSpPr>
       <p:sp>
         <p:nvSpPr>
-          <p:cNvPr id="1295067303" name="Title Placeholder 1"/>
+          <p:cNvPr id="1249477258" name="Title Placeholder 1"/>
           <p:cNvSpPr>
             <a:spLocks noGrp="1"/>
           </p:cNvSpPr>
@@ -3428,7 +3514,7 @@
       </p:sp>
       <p:sp>
         <p:nvSpPr>
-          <p:cNvPr id="1159453698" name="Text Placeholder 2"/>
+          <p:cNvPr id="95080352" name="Text Placeholder 2"/>
           <p:cNvSpPr>
             <a:spLocks noGrp="1"/>
           </p:cNvSpPr>
@@ -3504,7 +3590,7 @@
       </p:sp>
       <p:sp>
         <p:nvSpPr>
-          <p:cNvPr id="1411845439" name="Date Placeholder 3"/>
+          <p:cNvPr id="1066953942" name="Date Placeholder 3"/>
           <p:cNvSpPr>
             <a:spLocks noGrp="1"/>
           </p:cNvSpPr>
@@ -3548,7 +3634,7 @@
       </p:sp>
       <p:sp>
         <p:nvSpPr>
-          <p:cNvPr id="938711135" name="Footer Placeholder 4"/>
+          <p:cNvPr id="753226161" name="Footer Placeholder 4"/>
           <p:cNvSpPr>
             <a:spLocks noGrp="1"/>
           </p:cNvSpPr>
@@ -3588,7 +3674,7 @@
       </p:sp>
       <p:sp>
         <p:nvSpPr>
-          <p:cNvPr id="116801781" name="Slide Number Placeholder 5"/>
+          <p:cNvPr id="1435426872" name="Slide Number Placeholder 5"/>
           <p:cNvSpPr>
             <a:spLocks noGrp="1"/>
           </p:cNvSpPr>
@@ -3948,7 +4034,7 @@
       </p:grpSpPr>
       <p:sp>
         <p:nvSpPr>
-          <p:cNvPr id="1047061126" name="Title 1"/>
+          <p:cNvPr id="298408262" name="Title 1"/>
           <p:cNvSpPr>
             <a:spLocks noGrp="1"/>
           </p:cNvSpPr>
@@ -3974,7 +4060,7 @@
       </p:sp>
       <p:sp>
         <p:nvSpPr>
-          <p:cNvPr id="1905940212" name="Subtitle 2"/>
+          <p:cNvPr id="144631668" name="Subtitle 2"/>
           <p:cNvSpPr>
             <a:spLocks noGrp="1"/>
           </p:cNvSpPr>
@@ -4033,7 +4119,7 @@
       </p:grpSpPr>
       <p:sp>
         <p:nvSpPr>
-          <p:cNvPr id="2124332224" name="Title 1"/>
+          <p:cNvPr id="1648015317" name="Title 1"/>
           <p:cNvSpPr>
             <a:spLocks noGrp="1"/>
           </p:cNvSpPr>
@@ -4059,7 +4145,7 @@
       </p:sp>
       <p:sp>
         <p:nvSpPr>
-          <p:cNvPr id="886202569" name="Content Placeholder 2"/>
+          <p:cNvPr id="773759680" name="Content Placeholder 2"/>
           <p:cNvSpPr>
             <a:spLocks noGrp="1"/>
           </p:cNvSpPr>
@@ -4095,6 +4181,10 @@
             <a:pPr>
               <a:defRPr/>
             </a:pPr>
+            <a:r>
+              <a:rPr lang="de-DE"/>
+              <a:t>GUI Elements</a:t>
+            </a:r>
             <a:endParaRPr/>
           </a:p>
         </p:txBody>
@@ -4134,7 +4224,7 @@
       </p:grpSpPr>
       <p:sp>
         <p:nvSpPr>
-          <p:cNvPr id="768383013" name="Title 1"/>
+          <p:cNvPr id="625163589" name="Title 1"/>
           <p:cNvSpPr>
             <a:spLocks noGrp="1"/>
           </p:cNvSpPr>
@@ -4160,7 +4250,7 @@
       </p:sp>
       <p:sp>
         <p:nvSpPr>
-          <p:cNvPr id="1173637005" name="Content Placeholder 2"/>
+          <p:cNvPr id="1895570773" name="Content Placeholder 2"/>
           <p:cNvSpPr>
             <a:spLocks noGrp="1"/>
           </p:cNvSpPr>
@@ -4244,7 +4334,7 @@
       </p:sp>
       <p:pic>
         <p:nvPicPr>
-          <p:cNvPr id="1012927471" name=""/>
+          <p:cNvPr id="838330350" name=""/>
           <p:cNvPicPr>
             <a:picLocks noChangeAspect="1"/>
           </p:cNvPicPr>
@@ -4266,7 +4356,7 @@
       </p:pic>
       <p:pic>
         <p:nvPicPr>
-          <p:cNvPr id="120000950" name=""/>
+          <p:cNvPr id="447443441" name=""/>
           <p:cNvPicPr>
             <a:picLocks noChangeAspect="1"/>
           </p:cNvPicPr>
@@ -4278,7 +4368,7 @@
         </p:blipFill>
         <p:spPr bwMode="auto">
           <a:xfrm>
-            <a:off x="4078287" y="4125912"/>
+            <a:off x="4078286" y="4125912"/>
             <a:ext cx="5305424" cy="1781174"/>
           </a:xfrm>
           <a:prstGeom prst="rect">
@@ -4321,7 +4411,7 @@
       </p:grpSpPr>
       <p:sp>
         <p:nvSpPr>
-          <p:cNvPr id="426531225" name="Title 1"/>
+          <p:cNvPr id="786432609" name="Title 1"/>
           <p:cNvSpPr>
             <a:spLocks noGrp="1"/>
           </p:cNvSpPr>
@@ -4354,7 +4444,7 @@
       </p:sp>
       <p:pic>
         <p:nvPicPr>
-          <p:cNvPr id="1430393829" name=""/>
+          <p:cNvPr id="287076266" name=""/>
           <p:cNvPicPr>
             <a:picLocks noChangeAspect="1"/>
           </p:cNvPicPr>
@@ -4377,12 +4467,12 @@
       </p:pic>
       <p:sp>
         <p:nvSpPr>
-          <p:cNvPr id="1335068991" name=""/>
+          <p:cNvPr id="1902357664" name=""/>
           <p:cNvSpPr txBox="1"/>
           <p:nvPr/>
         </p:nvSpPr>
         <p:spPr bwMode="auto">
-          <a:xfrm rot="16199999" flipH="0" flipV="0">
+          <a:xfrm rot="16199998" flipH="0" flipV="0">
             <a:off x="1890749" y="1762124"/>
             <a:ext cx="767817" cy="366119"/>
           </a:xfrm>
@@ -4409,12 +4499,12 @@
       </p:sp>
       <p:sp>
         <p:nvSpPr>
-          <p:cNvPr id="809893652" name=""/>
+          <p:cNvPr id="1361587484" name=""/>
           <p:cNvSpPr txBox="1"/>
           <p:nvPr/>
         </p:nvSpPr>
         <p:spPr bwMode="auto">
-          <a:xfrm rot="16199999" flipH="0" flipV="0">
+          <a:xfrm rot="16199998" flipH="0" flipV="0">
             <a:off x="3448584" y="1762304"/>
             <a:ext cx="767817" cy="366119"/>
           </a:xfrm>
@@ -4445,12 +4535,12 @@
       </p:sp>
       <p:sp>
         <p:nvSpPr>
-          <p:cNvPr id="31451715" name=""/>
+          <p:cNvPr id="2128216187" name=""/>
           <p:cNvSpPr txBox="1"/>
           <p:nvPr/>
         </p:nvSpPr>
         <p:spPr bwMode="auto">
-          <a:xfrm rot="16199999" flipH="0" flipV="0">
+          <a:xfrm rot="16199998" flipH="0" flipV="0">
             <a:off x="3859249" y="2841954"/>
             <a:ext cx="2927116" cy="366119"/>
           </a:xfrm>
@@ -4477,12 +4567,12 @@
       </p:sp>
       <p:sp>
         <p:nvSpPr>
-          <p:cNvPr id="1921595254" name=""/>
+          <p:cNvPr id="796931516" name=""/>
           <p:cNvSpPr txBox="1"/>
           <p:nvPr/>
         </p:nvSpPr>
         <p:spPr bwMode="auto">
-          <a:xfrm rot="16199999" flipH="0" flipV="0">
+          <a:xfrm rot="16199998" flipH="0" flipV="0">
             <a:off x="5272124" y="2962672"/>
             <a:ext cx="3168552" cy="366119"/>
           </a:xfrm>
@@ -4509,12 +4599,12 @@
       </p:sp>
       <p:sp>
         <p:nvSpPr>
-          <p:cNvPr id="350130103" name=""/>
+          <p:cNvPr id="160420621" name=""/>
           <p:cNvSpPr txBox="1"/>
           <p:nvPr/>
         </p:nvSpPr>
         <p:spPr bwMode="auto">
-          <a:xfrm rot="16199999" flipH="0" flipV="0">
+          <a:xfrm rot="16199998" flipH="0" flipV="0">
             <a:off x="8648767" y="2638802"/>
             <a:ext cx="2520813" cy="366119"/>
           </a:xfrm>
@@ -4549,7 +4639,7 @@
       </p:sp>
       <p:sp>
         <p:nvSpPr>
-          <p:cNvPr id="1914038021" name=""/>
+          <p:cNvPr id="1339767994" name=""/>
           <p:cNvSpPr txBox="1"/>
           <p:nvPr/>
         </p:nvSpPr>
@@ -4587,6 +4677,167 @@
           </a:p>
         </p:txBody>
       </p:sp>
+    </p:spTree>
+  </p:cSld>
+  <p:clrMapOvr>
+    <a:masterClrMapping/>
+  </p:clrMapOvr>
+  <mc:AlternateContent xmlns:mc="http://schemas.openxmlformats.org/markup-compatibility/2006">
+    <mc:Choice xmlns:p159="http://schemas.microsoft.com/office/powerpoint/2015/09/main" xmlns:p14="http://schemas.microsoft.com/office/powerpoint/2010/main" Requires="p159">
+      <p:transition p14:dur="500" advClick="1"/>
+    </mc:Choice>
+    <mc:Fallback>
+      <p:transition advClick="1"/>
+    </mc:Fallback>
+  </mc:AlternateContent>
+</p:sld>
+</file>
+
+<file path=ppt/slides/slide5.xml><?xml version="1.0" encoding="utf-8"?>
+<p:sld xmlns:a="http://schemas.openxmlformats.org/drawingml/2006/main" xmlns:r="http://schemas.openxmlformats.org/officeDocument/2006/relationships" xmlns:p="http://schemas.openxmlformats.org/presentationml/2006/main" xmlns:m="http://schemas.openxmlformats.org/officeDocument/2006/math" xmlns:w="http://schemas.openxmlformats.org/wordprocessingml/2006/main" xmlns:mc="http://schemas.openxmlformats.org/markup-compatibility/2006" showMasterPhAnim="0" showMasterSp="1" show="1">
+  <p:cSld name="">
+    <p:spTree>
+      <p:nvGrpSpPr>
+        <p:cNvPr id="1" name=""/>
+        <p:cNvGrpSpPr/>
+        <p:nvPr/>
+      </p:nvGrpSpPr>
+      <p:grpSpPr bwMode="auto">
+        <a:xfrm>
+          <a:off x="0" y="0"/>
+          <a:ext cx="0" cy="0"/>
+          <a:chOff x="0" y="0"/>
+          <a:chExt cx="0" cy="0"/>
+        </a:xfrm>
+      </p:grpSpPr>
+      <p:sp>
+        <p:nvSpPr>
+          <p:cNvPr id="1553137827" name="Title 1"/>
+          <p:cNvSpPr>
+            <a:spLocks noGrp="1"/>
+          </p:cNvSpPr>
+          <p:nvPr>
+            <p:ph type="title"/>
+          </p:nvPr>
+        </p:nvSpPr>
+        <p:spPr bwMode="auto"/>
+        <p:txBody>
+          <a:bodyPr/>
+          <a:lstStyle/>
+          <a:p>
+            <a:pPr>
+              <a:defRPr/>
+            </a:pPr>
+            <a:r>
+              <a:rPr lang="de-DE"/>
+              <a:t>GUI Elements</a:t>
+            </a:r>
+            <a:endParaRPr/>
+          </a:p>
+        </p:txBody>
+      </p:sp>
+      <p:sp>
+        <p:nvSpPr>
+          <p:cNvPr id="991031962" name="Content Placeholder 2"/>
+          <p:cNvSpPr>
+            <a:spLocks noGrp="1"/>
+          </p:cNvSpPr>
+          <p:nvPr>
+            <p:ph idx="1"/>
+          </p:nvPr>
+        </p:nvSpPr>
+        <p:spPr bwMode="auto"/>
+        <p:txBody>
+          <a:bodyPr/>
+          <a:lstStyle/>
+          <a:p>
+            <a:pPr>
+              <a:defRPr/>
+            </a:pPr>
+            <a:r>
+              <a:rPr lang="de-DE"/>
+              <a:t>Rounded corners (4px)</a:t>
+            </a:r>
+            <a:endParaRPr lang="de-DE"/>
+          </a:p>
+          <a:p>
+            <a:pPr>
+              <a:defRPr/>
+            </a:pPr>
+            <a:r>
+              <a:rPr lang="de-DE"/>
+              <a:t>Buttons are circles or oval (25px)</a:t>
+            </a:r>
+            <a:endParaRPr lang="de-DE"/>
+          </a:p>
+          <a:p>
+            <a:pPr>
+              <a:defRPr/>
+            </a:pPr>
+            <a:r>
+              <a:rPr lang="de-DE"/>
+              <a:t>Textboxes have rounded corners (4px)										</a:t>
+            </a:r>
+            <a:endParaRPr lang="de-DE"/>
+          </a:p>
+          <a:p>
+            <a:pPr>
+              <a:defRPr/>
+            </a:pPr>
+            <a:endParaRPr lang="de-DE"/>
+          </a:p>
+          <a:p>
+            <a:pPr>
+              <a:defRPr/>
+            </a:pPr>
+            <a:endParaRPr/>
+          </a:p>
+        </p:txBody>
+      </p:sp>
+      <p:pic>
+        <p:nvPicPr>
+          <p:cNvPr id="1693414679" name=""/>
+          <p:cNvPicPr>
+            <a:picLocks noChangeAspect="1"/>
+          </p:cNvPicPr>
+          <p:nvPr/>
+        </p:nvPicPr>
+        <p:blipFill rotWithShape="1">
+          <a:blip r:embed="rId3"/>
+          <a:stretch/>
+        </p:blipFill>
+        <p:spPr bwMode="auto">
+          <a:xfrm>
+            <a:off x="8729662" y="1417788"/>
+            <a:ext cx="2695574" cy="1019174"/>
+          </a:xfrm>
+          <a:prstGeom prst="rect">
+            <a:avLst/>
+          </a:prstGeom>
+        </p:spPr>
+      </p:pic>
+      <p:pic>
+        <p:nvPicPr>
+          <p:cNvPr id="663910497" name=""/>
+          <p:cNvPicPr>
+            <a:picLocks noChangeAspect="1"/>
+          </p:cNvPicPr>
+          <p:nvPr/>
+        </p:nvPicPr>
+        <p:blipFill rotWithShape="1">
+          <a:blip r:embed="rId4"/>
+          <a:stretch/>
+        </p:blipFill>
+        <p:spPr bwMode="auto">
+          <a:xfrm>
+            <a:off x="8310562" y="2505074"/>
+            <a:ext cx="3533774" cy="971550"/>
+          </a:xfrm>
+          <a:prstGeom prst="rect">
+            <a:avLst/>
+          </a:prstGeom>
+        </p:spPr>
+      </p:pic>
     </p:spTree>
   </p:cSld>
   <p:clrMapOvr>
